--- a/프로젝트_SOS_주간보고.pptx
+++ b/프로젝트_SOS_주간보고.pptx
@@ -1680,7 +1680,7 @@
                           <a:ea typeface="Malgun Gothic" pitchFamily="34" charset="-122"/>
                           <a:cs typeface="Malgun Gothic" pitchFamily="34" charset="-120"/>
                         </a:rPr>
-                        <a:t>회원보증금 신규 도입 (SP 실계약 5건 검증)</a:t>
+                        <a:t>SOS 수익성 모델 전체 설계·구축</a:t>
                       </a:r>
                       <a:endParaRPr lang="en-US" sz="1200" dirty="0"/>
                     </a:p>
@@ -1701,7 +1701,7 @@
                           <a:ea typeface="Malgun Gothic" pitchFamily="34" charset="-122"/>
                           <a:cs typeface="Malgun Gothic" pitchFamily="34" charset="-120"/>
                         </a:rPr>
-                        <a:t>부가세포함 표준요금×2개월 공식을 SP 실계약서 5건 대조로 검증</a:t>
+                        <a:t>배치도(룸 배치·문·복도) 기준으로 좌석·룸수·매출이 자동 산출되는 계산 엔진 구축(4개 모델)</a:t>
                       </a:r>
                       <a:endParaRPr lang="en-US" sz="1200" dirty="0"/>
                     </a:p>
@@ -1722,7 +1722,28 @@
                           <a:ea typeface="Malgun Gothic" pitchFamily="34" charset="-122"/>
                           <a:cs typeface="Malgun Gothic" pitchFamily="34" charset="-120"/>
                         </a:rPr>
-                        <a:t>SOS 단기계약 특성 반영: 1주=0 / 1~5개월=1개월치 / 6~11개월=1.5개월치 / 1년이상=2개월치</a:t>
+                        <a:t>가격정책을 "BEP 65% 역산가 + 경쟁사 상한 체크" 방식으로 확정</a:t>
+                      </a:r>
+                      <a:endParaRPr lang="en-US" sz="1200" dirty="0"/>
+                    </a:p>
+                    <a:p>
+                      <a:pPr marL="342900" indent="-342900">
+                        <a:spcAft>
+                          <a:spcPts val="300"/>
+                        </a:spcAft>
+                        <a:buSzPct val="100000"/>
+                        <a:buChar char="●"/>
+                      </a:pPr>
+                      <a:r>
+                        <a:rPr lang="en-US" sz="1150" b="1" dirty="0">
+                          <a:solidFill>
+                            <a:srgbClr val="1F2937"/>
+                          </a:solidFill>
+                          <a:latin typeface="Malgun Gothic" pitchFamily="34" charset="0"/>
+                          <a:ea typeface="Malgun Gothic" pitchFamily="34" charset="-122"/>
+                          <a:cs typeface="Malgun Gothic" pitchFamily="34" charset="-120"/>
+                        </a:rPr>
+                        <a:t>경쟁사 실계약·제안서 자료 확보 및 대조</a:t>
                       </a:r>
                       <a:endParaRPr lang="en-US" sz="1200" dirty="0"/>
                     </a:p>
@@ -1743,7 +1764,28 @@
                           <a:ea typeface="Malgun Gothic" pitchFamily="34" charset="-122"/>
                           <a:cs typeface="Malgun Gothic" pitchFamily="34" charset="-120"/>
                         </a:rPr>
-                        <a:t>초기투자금 조달과는 무관함을 명확화(반환의무 부채로 재정의, 보고서 표현 오류 수정)</a:t>
+                        <a:t>스파크플러스·패스트파이브 실계약서·입주제안서 확보(분당2호점·여의도 등) 및 실거래가·크레딧 조건 검증</a:t>
+                      </a:r>
+                      <a:endParaRPr lang="en-US" sz="1200" dirty="0"/>
+                    </a:p>
+                    <a:p>
+                      <a:pPr lvl="1" marL="685800" indent="-342900">
+                        <a:spcAft>
+                          <a:spcPts val="300"/>
+                        </a:spcAft>
+                        <a:buSzPct val="100000"/>
+                        <a:buChar char="▸"/>
+                      </a:pPr>
+                      <a:r>
+                        <a:rPr lang="en-US" sz="1050" dirty="0">
+                          <a:solidFill>
+                            <a:srgbClr val="1F2937"/>
+                          </a:solidFill>
+                          <a:latin typeface="Malgun Gothic" pitchFamily="34" charset="0"/>
+                          <a:ea typeface="Malgun Gothic" pitchFamily="34" charset="-122"/>
+                          <a:cs typeface="Malgun Gothic" pitchFamily="34" charset="-120"/>
+                        </a:rPr>
+                        <a:t>회원보증금 산정식도 SP 실계약 5건 대조로 검증 후 신규 반영</a:t>
                       </a:r>
                       <a:endParaRPr lang="en-US" sz="1200" dirty="0"/>
                     </a:p>
@@ -1764,7 +1806,7 @@
                           <a:ea typeface="Malgun Gothic" pitchFamily="34" charset="-122"/>
                           <a:cs typeface="Malgun Gothic" pitchFamily="34" charset="-120"/>
                         </a:rPr>
-                        <a:t>CAPEX 단가 실측 재검증 및 전체 재계산</a:t>
+                        <a:t>후보 매물 실측 확정</a:t>
                       </a:r>
                       <a:endParaRPr lang="en-US" sz="1200" dirty="0"/>
                     </a:p>
@@ -1785,7 +1827,28 @@
                           <a:ea typeface="Malgun Gothic" pitchFamily="34" charset="-122"/>
                           <a:cs typeface="Malgun Gothic" pitchFamily="34" charset="-120"/>
                         </a:rPr>
-                        <a:t>전기·통신 7만→4만/평 (네트워크공사·전기 견적서 근거 확인)</a:t>
+                        <a:t>판교(에이치스퀘어 S동 B1)·분당 100/120/150평 매물 임대조건(월세·보증금) 실측 확정</a:t>
+                      </a:r>
+                      <a:endParaRPr lang="en-US" sz="1200" dirty="0"/>
+                    </a:p>
+                    <a:p>
+                      <a:pPr marL="342900" indent="-342900">
+                        <a:spcAft>
+                          <a:spcPts val="300"/>
+                        </a:spcAft>
+                        <a:buSzPct val="100000"/>
+                        <a:buChar char="●"/>
+                      </a:pPr>
+                      <a:r>
+                        <a:rPr lang="en-US" sz="1150" b="1" dirty="0">
+                          <a:solidFill>
+                            <a:srgbClr val="1F2937"/>
+                          </a:solidFill>
+                          <a:latin typeface="Malgun Gothic" pitchFamily="34" charset="0"/>
+                          <a:ea typeface="Malgun Gothic" pitchFamily="34" charset="-122"/>
+                          <a:cs typeface="Malgun Gothic" pitchFamily="34" charset="-120"/>
+                        </a:rPr>
+                        <a:t>CAPEX 항목 실제 견적서 기반 검증</a:t>
                       </a:r>
                       <a:endParaRPr lang="en-US" sz="1200" dirty="0"/>
                     </a:p>
@@ -1806,7 +1869,7 @@
                           <a:ea typeface="Malgun Gothic" pitchFamily="34" charset="-122"/>
                           <a:cs typeface="Malgun Gothic" pitchFamily="34" charset="-120"/>
                         </a:rPr>
-                        <a:t>보안·CCTV·출입통제 200만→86만 (ADT캡스 실견적서 확인)</a:t>
+                        <a:t>소방·냉난방·인테리어·도어락·보안 등 실제 견적서/계약서로 단가 검증</a:t>
                       </a:r>
                       <a:endParaRPr lang="en-US" sz="1200" dirty="0"/>
                     </a:p>
@@ -1827,7 +1890,28 @@
                           <a:ea typeface="Malgun Gothic" pitchFamily="34" charset="-122"/>
                           <a:cs typeface="Malgun Gothic" pitchFamily="34" charset="-120"/>
                         </a:rPr>
-                        <a:t>라운지가구 100만→150만 상향(면적 대비 현실화)</a:t>
+                        <a:t>금주 후반: 전기통신 7→4만/평, 보안 200→86만 추가 실측 보정 및 4개 모델 전체 재계산</a:t>
+                      </a:r>
+                      <a:endParaRPr lang="en-US" sz="1200" dirty="0"/>
+                    </a:p>
+                    <a:p>
+                      <a:pPr marL="342900" indent="-342900">
+                        <a:spcAft>
+                          <a:spcPts val="300"/>
+                        </a:spcAft>
+                        <a:buSzPct val="100000"/>
+                        <a:buChar char="●"/>
+                      </a:pPr>
+                      <a:r>
+                        <a:rPr lang="en-US" sz="1150" b="1" dirty="0">
+                          <a:solidFill>
+                            <a:srgbClr val="1F2937"/>
+                          </a:solidFill>
+                          <a:latin typeface="Malgun Gothic" pitchFamily="34" charset="0"/>
+                          <a:ea typeface="Malgun Gothic" pitchFamily="34" charset="-122"/>
+                          <a:cs typeface="Malgun Gothic" pitchFamily="34" charset="-120"/>
+                        </a:rPr>
+                        <a:t>배치도·가구배치 반복 설계</a:t>
                       </a:r>
                       <a:endParaRPr lang="en-US" sz="1200" dirty="0"/>
                     </a:p>
@@ -1848,7 +1932,7 @@
                           <a:ea typeface="Malgun Gothic" pitchFamily="34" charset="-122"/>
                           <a:cs typeface="Malgun Gothic" pitchFamily="34" charset="-120"/>
                         </a:rPr>
-                        <a:t>4개 모델(100평형·120평·150평·판교) BEP·손익·투자금 전체 재계산</a:t>
+                        <a:t>문 위치·책상 배치·비정형 손실 구간 등 실측 렌더링 검증 반복(책상 1200×700mm 최종 반영)</a:t>
                       </a:r>
                       <a:endParaRPr lang="en-US" sz="1200" dirty="0"/>
                     </a:p>
@@ -1869,7 +1953,7 @@
                           <a:ea typeface="Malgun Gothic" pitchFamily="34" charset="-122"/>
                           <a:cs typeface="Malgun Gothic" pitchFamily="34" charset="-120"/>
                         </a:rPr>
-                        <a:t>보고서 투명성·가독성 개선</a:t>
+                        <a:t>보고서 통합 및 산출물 확장</a:t>
                       </a:r>
                       <a:endParaRPr lang="en-US" sz="1200" dirty="0"/>
                     </a:p>
@@ -1890,7 +1974,7 @@
                           <a:ea typeface="Malgun Gothic" pitchFamily="34" charset="-122"/>
                           <a:cs typeface="Malgun Gothic" pitchFamily="34" charset="-120"/>
                         </a:rPr>
-                        <a:t>월별 손익 흐름(현금흐름 워터폴) 표 신설, 전 항목 계산식 노출</a:t>
+                        <a:t>개별 보고서를 SOS_최종보고서.html 하나로 통합, 현금흐름 워터폴 표 등 투명성 개선</a:t>
                       </a:r>
                       <a:endParaRPr lang="en-US" sz="1200" dirty="0"/>
                     </a:p>
@@ -1911,154 +1995,7 @@
                           <a:ea typeface="Malgun Gothic" pitchFamily="34" charset="-122"/>
                           <a:cs typeface="Malgun Gothic" pitchFamily="34" charset="-120"/>
                         </a:rPr>
-                        <a:t>가구배치도 책상 규격 1200×700mm 실측 반영</a:t>
-                      </a:r>
-                      <a:endParaRPr lang="en-US" sz="1200" dirty="0"/>
-                    </a:p>
-                    <a:p>
-                      <a:pPr lvl="1" marL="685800" indent="-342900">
-                        <a:spcAft>
-                          <a:spcPts val="300"/>
-                        </a:spcAft>
-                        <a:buSzPct val="100000"/>
-                        <a:buChar char="▸"/>
-                      </a:pPr>
-                      <a:r>
-                        <a:rPr lang="en-US" sz="1050" dirty="0">
-                          <a:solidFill>
-                            <a:srgbClr val="1F2937"/>
-                          </a:solidFill>
-                          <a:latin typeface="Malgun Gothic" pitchFamily="34" charset="0"/>
-                          <a:ea typeface="Malgun Gothic" pitchFamily="34" charset="-122"/>
-                          <a:cs typeface="Malgun Gothic" pitchFamily="34" charset="-120"/>
-                        </a:rPr>
-                        <a:t>저근거 섹션(전용평당 손익) 삭제 및 섹션 재정비</a:t>
-                      </a:r>
-                      <a:endParaRPr lang="en-US" sz="1200" dirty="0"/>
-                    </a:p>
-                    <a:p>
-                      <a:pPr marL="342900" indent="-342900">
-                        <a:spcAft>
-                          <a:spcPts val="300"/>
-                        </a:spcAft>
-                        <a:buSzPct val="100000"/>
-                        <a:buChar char="●"/>
-                      </a:pPr>
-                      <a:r>
-                        <a:rPr lang="en-US" sz="1150" b="1" dirty="0">
-                          <a:solidFill>
-                            <a:srgbClr val="1F2937"/>
-                          </a:solidFill>
-                          <a:latin typeface="Malgun Gothic" pitchFamily="34" charset="0"/>
-                          <a:ea typeface="Malgun Gothic" pitchFamily="34" charset="-122"/>
-                          <a:cs typeface="Malgun Gothic" pitchFamily="34" charset="-120"/>
-                        </a:rPr>
-                        <a:t>1~4인실 수요 근거 리서치</a:t>
-                      </a:r>
-                      <a:endParaRPr lang="en-US" sz="1200" dirty="0"/>
-                    </a:p>
-                    <a:p>
-                      <a:pPr lvl="1" marL="685800" indent="-342900">
-                        <a:spcAft>
-                          <a:spcPts val="300"/>
-                        </a:spcAft>
-                        <a:buSzPct val="100000"/>
-                        <a:buChar char="▸"/>
-                      </a:pPr>
-                      <a:r>
-                        <a:rPr lang="en-US" sz="1050" dirty="0">
-                          <a:solidFill>
-                            <a:srgbClr val="1F2937"/>
-                          </a:solidFill>
-                          <a:latin typeface="Malgun Gothic" pitchFamily="34" charset="0"/>
-                          <a:ea typeface="Malgun Gothic" pitchFamily="34" charset="-122"/>
-                          <a:cs typeface="Malgun Gothic" pitchFamily="34" charset="-120"/>
-                        </a:rPr>
-                        <a:t>통계청 사업체 규모 분포, 스타트업 팀 규모 등 정황 데이터 확보</a:t>
-                      </a:r>
-                      <a:endParaRPr lang="en-US" sz="1200" dirty="0"/>
-                    </a:p>
-                    <a:p>
-                      <a:pPr lvl="1" marL="685800" indent="-342900">
-                        <a:spcAft>
-                          <a:spcPts val="300"/>
-                        </a:spcAft>
-                        <a:buSzPct val="100000"/>
-                        <a:buChar char="▸"/>
-                      </a:pPr>
-                      <a:r>
-                        <a:rPr lang="en-US" sz="1050" dirty="0">
-                          <a:solidFill>
-                            <a:srgbClr val="1F2937"/>
-                          </a:solidFill>
-                          <a:latin typeface="Malgun Gothic" pitchFamily="34" charset="0"/>
-                          <a:ea typeface="Malgun Gothic" pitchFamily="34" charset="-122"/>
-                          <a:cs typeface="Malgun Gothic" pitchFamily="34" charset="-120"/>
-                        </a:rPr>
-                        <a:t>SP 분당2호점 실제 제안서 확인 — 경쟁사 1~4인실 공급 부재 확인(추가 검증 필요)</a:t>
-                      </a:r>
-                      <a:endParaRPr lang="en-US" sz="1200" dirty="0"/>
-                    </a:p>
-                    <a:p>
-                      <a:pPr marL="342900" indent="-342900">
-                        <a:spcAft>
-                          <a:spcPts val="300"/>
-                        </a:spcAft>
-                        <a:buSzPct val="100000"/>
-                        <a:buChar char="●"/>
-                      </a:pPr>
-                      <a:r>
-                        <a:rPr lang="en-US" sz="1150" b="1" dirty="0">
-                          <a:solidFill>
-                            <a:srgbClr val="1F2937"/>
-                          </a:solidFill>
-                          <a:latin typeface="Malgun Gothic" pitchFamily="34" charset="0"/>
-                          <a:ea typeface="Malgun Gothic" pitchFamily="34" charset="-122"/>
-                          <a:cs typeface="Malgun Gothic" pitchFamily="34" charset="-120"/>
-                        </a:rPr>
-                        <a:t>산출물 다각화</a:t>
-                      </a:r>
-                      <a:endParaRPr lang="en-US" sz="1200" dirty="0"/>
-                    </a:p>
-                    <a:p>
-                      <a:pPr lvl="1" marL="685800" indent="-342900">
-                        <a:spcAft>
-                          <a:spcPts val="300"/>
-                        </a:spcAft>
-                        <a:buSzPct val="100000"/>
-                        <a:buChar char="▸"/>
-                      </a:pPr>
-                      <a:r>
-                        <a:rPr lang="en-US" sz="1050" dirty="0">
-                          <a:solidFill>
-                            <a:srgbClr val="1F2937"/>
-                          </a:solidFill>
-                          <a:latin typeface="Malgun Gothic" pitchFamily="34" charset="0"/>
-                          <a:ea typeface="Malgun Gothic" pitchFamily="34" charset="-122"/>
-                          <a:cs typeface="Malgun Gothic" pitchFamily="34" charset="-120"/>
-                        </a:rPr>
-                        <a:t>전체 보고서 표 Excel 워크북 추출(20개 시트)</a:t>
-                      </a:r>
-                      <a:endParaRPr lang="en-US" sz="1200" dirty="0"/>
-                    </a:p>
-                    <a:p>
-                      <a:pPr lvl="1" marL="685800" indent="-342900">
-                        <a:spcAft>
-                          <a:spcPts val="300"/>
-                        </a:spcAft>
-                        <a:buSzPct val="100000"/>
-                        <a:buChar char="▸"/>
-                      </a:pPr>
-                      <a:r>
-                        <a:rPr lang="en-US" sz="1050" dirty="0">
-                          <a:solidFill>
-                            <a:srgbClr val="1F2937"/>
-                          </a:solidFill>
-                          <a:latin typeface="Malgun Gothic" pitchFamily="34" charset="0"/>
-                          <a:ea typeface="Malgun Gothic" pitchFamily="34" charset="-122"/>
-                          <a:cs typeface="Malgun Gothic" pitchFamily="34" charset="-120"/>
-                        </a:rPr>
-                        <a:t>워드 사업계획서 작성 — 실투자금 2억 현금흐름 기준 회수기간(3.7년) 중심 설득 논리</a:t>
+                        <a:t>Excel(표 20개 시트)·워드 사업계획서·투자설득 PPT·주간보고 PPT까지 산출물 다각화(금주 후반)</a:t>
                       </a:r>
                       <a:endParaRPr lang="en-US" sz="1200" dirty="0"/>
                     </a:p>
@@ -2194,27 +2131,6 @@
                       <a:endParaRPr lang="en-US" sz="1200" dirty="0"/>
                     </a:p>
                     <a:p>
-                      <a:pPr marL="342900" indent="-342900">
-                        <a:spcAft>
-                          <a:spcPts val="300"/>
-                        </a:spcAft>
-                        <a:buSzPct val="100000"/>
-                        <a:buChar char="●"/>
-                      </a:pPr>
-                      <a:r>
-                        <a:rPr lang="en-US" sz="1150" b="1" dirty="0">
-                          <a:solidFill>
-                            <a:srgbClr val="1F2937"/>
-                          </a:solidFill>
-                          <a:latin typeface="Malgun Gothic" pitchFamily="34" charset="0"/>
-                          <a:ea typeface="Malgun Gothic" pitchFamily="34" charset="-122"/>
-                          <a:cs typeface="Malgun Gothic" pitchFamily="34" charset="-120"/>
-                        </a:rPr>
-                        <a:t>후보 매물 실사</a:t>
-                      </a:r>
-                      <a:endParaRPr lang="en-US" sz="1200" dirty="0"/>
-                    </a:p>
-                    <a:p>
                       <a:pPr lvl="1" marL="685800" indent="-342900">
                         <a:spcAft>
                           <a:spcPts val="300"/>
@@ -2231,28 +2147,7 @@
                           <a:ea typeface="Malgun Gothic" pitchFamily="34" charset="-122"/>
                           <a:cs typeface="Malgun Gothic" pitchFamily="34" charset="-120"/>
                         </a:rPr>
-                        <a:t>근생 용도·전대 허용·권리금 여부 확인</a:t>
-                      </a:r>
-                      <a:endParaRPr lang="en-US" sz="1200" dirty="0"/>
-                    </a:p>
-                    <a:p>
-                      <a:pPr lvl="1" marL="685800" indent="-342900">
-                        <a:spcAft>
-                          <a:spcPts val="300"/>
-                        </a:spcAft>
-                        <a:buSzPct val="100000"/>
-                        <a:buChar char="▸"/>
-                      </a:pPr>
-                      <a:r>
-                        <a:rPr lang="en-US" sz="1050" dirty="0">
-                          <a:solidFill>
-                            <a:srgbClr val="1F2937"/>
-                          </a:solidFill>
-                          <a:latin typeface="Malgun Gothic" pitchFamily="34" charset="0"/>
-                          <a:ea typeface="Malgun Gothic" pitchFamily="34" charset="-122"/>
-                          <a:cs typeface="Malgun Gothic" pitchFamily="34" charset="-120"/>
-                        </a:rPr>
-                        <a:t>소방·공조 가견적 확보(스프링클러 설치대상 여부 포함)</a:t>
+                        <a:t>※ 매물 실사(근생 용도·전대·소방)는 내부 투자승인 이후 착수 예정</a:t>
                       </a:r>
                       <a:endParaRPr lang="en-US" sz="1200" dirty="0"/>
                     </a:p>
@@ -2658,7 +2553,7 @@
         <p:spPr>
           <a:xfrm>
             <a:off x="1737360" y="1554480"/>
-            <a:ext cx="1463040" cy="548640"/>
+            <a:ext cx="822960" cy="548640"/>
           </a:xfrm>
           <a:prstGeom prst="roundRect">
             <a:avLst>
@@ -2680,7 +2575,7 @@
         <p:spPr>
           <a:xfrm>
             <a:off x="1737360" y="1554480"/>
-            <a:ext cx="1463040" cy="548640"/>
+            <a:ext cx="822960" cy="548640"/>
           </a:xfrm>
           <a:prstGeom prst="rect">
             <a:avLst/>
@@ -2704,7 +2599,7 @@
                 <a:ea typeface="Malgun Gothic" pitchFamily="34" charset="-122"/>
                 <a:cs typeface="Malgun Gothic" pitchFamily="34" charset="-120"/>
               </a:rPr>
-              <a:t>모델링·CAPEX검증(7월)</a:t>
+              <a:t>모델링·검증</a:t>
             </a:r>
             <a:endParaRPr lang="en-US" sz="1100" dirty="0"/>
           </a:p>
@@ -2718,7 +2613,7 @@
         </p:nvSpPr>
         <p:spPr>
           <a:xfrm rot="-480000">
-            <a:off x="2697480" y="1298448"/>
+            <a:off x="2057400" y="1298448"/>
             <a:ext cx="640080" cy="320040"/>
           </a:xfrm>
           <a:prstGeom prst="rect">
@@ -2763,8 +2658,8 @@
         </p:nvSpPr>
         <p:spPr>
           <a:xfrm>
-            <a:off x="3291840" y="1554480"/>
-            <a:ext cx="1554480" cy="548640"/>
+            <a:off x="2560320" y="1554480"/>
+            <a:ext cx="1005840" cy="548640"/>
           </a:xfrm>
           <a:prstGeom prst="roundRect">
             <a:avLst>
@@ -2785,8 +2680,8 @@
         </p:nvSpPr>
         <p:spPr>
           <a:xfrm>
-            <a:off x="3291840" y="1554480"/>
-            <a:ext cx="1554480" cy="548640"/>
+            <a:off x="2560320" y="1554480"/>
+            <a:ext cx="1005840" cy="548640"/>
           </a:xfrm>
           <a:prstGeom prst="rect">
             <a:avLst/>
@@ -2810,7 +2705,7 @@
                 <a:ea typeface="Malgun Gothic" pitchFamily="34" charset="-122"/>
                 <a:cs typeface="Malgun Gothic" pitchFamily="34" charset="-120"/>
               </a:rPr>
-              <a:t>부사장 투자승인(7월말)</a:t>
+              <a:t>내부 투자승인(7월 중순)</a:t>
             </a:r>
             <a:endParaRPr lang="en-US" sz="1100" dirty="0"/>
           </a:p>
@@ -2863,8 +2758,8 @@
         </p:nvSpPr>
         <p:spPr>
           <a:xfrm>
-            <a:off x="3108960" y="2423160"/>
-            <a:ext cx="1737360" cy="548640"/>
+            <a:off x="3566160" y="2423160"/>
+            <a:ext cx="1188720" cy="548640"/>
           </a:xfrm>
           <a:prstGeom prst="roundRect">
             <a:avLst>
@@ -2885,8 +2780,8 @@
         </p:nvSpPr>
         <p:spPr>
           <a:xfrm>
-            <a:off x="3108960" y="2423160"/>
-            <a:ext cx="1737360" cy="548640"/>
+            <a:off x="3566160" y="2423160"/>
+            <a:ext cx="1188720" cy="548640"/>
           </a:xfrm>
           <a:prstGeom prst="rect">
             <a:avLst/>
@@ -2910,7 +2805,7 @@
                 <a:ea typeface="Malgun Gothic" pitchFamily="34" charset="-122"/>
                 <a:cs typeface="Malgun Gothic" pitchFamily="34" charset="-120"/>
               </a:rPr>
-              <a:t>실사·정식견적(8월)</a:t>
+              <a:t>실사·정식견적(7월말~8월)</a:t>
             </a:r>
             <a:endParaRPr lang="en-US" sz="1100" dirty="0"/>
           </a:p>
@@ -2924,8 +2819,8 @@
         </p:nvSpPr>
         <p:spPr>
           <a:xfrm>
-            <a:off x="4937760" y="2423160"/>
-            <a:ext cx="1463040" cy="548640"/>
+            <a:off x="4754880" y="2423160"/>
+            <a:ext cx="1005840" cy="548640"/>
           </a:xfrm>
           <a:prstGeom prst="roundRect">
             <a:avLst>
@@ -2946,8 +2841,8 @@
         </p:nvSpPr>
         <p:spPr>
           <a:xfrm>
-            <a:off x="4937760" y="2423160"/>
-            <a:ext cx="1463040" cy="548640"/>
+            <a:off x="4754880" y="2423160"/>
+            <a:ext cx="1005840" cy="548640"/>
           </a:xfrm>
           <a:prstGeom prst="rect">
             <a:avLst/>
@@ -2971,7 +2866,7 @@
                 <a:ea typeface="Malgun Gothic" pitchFamily="34" charset="-122"/>
                 <a:cs typeface="Malgun Gothic" pitchFamily="34" charset="-120"/>
               </a:rPr>
-              <a:t>임대차 계약(9월)</a:t>
+              <a:t>임대차 계약(8월말)</a:t>
             </a:r>
             <a:endParaRPr lang="en-US" sz="1100" dirty="0"/>
           </a:p>
@@ -3024,8 +2919,8 @@
         </p:nvSpPr>
         <p:spPr>
           <a:xfrm>
-            <a:off x="5029200" y="3291840"/>
-            <a:ext cx="2011680" cy="548640"/>
+            <a:off x="5760720" y="3291840"/>
+            <a:ext cx="1463040" cy="548640"/>
           </a:xfrm>
           <a:prstGeom prst="roundRect">
             <a:avLst>
@@ -3046,8 +2941,8 @@
         </p:nvSpPr>
         <p:spPr>
           <a:xfrm>
-            <a:off x="5029200" y="3291840"/>
-            <a:ext cx="2011680" cy="548640"/>
+            <a:off x="5760720" y="3291840"/>
+            <a:ext cx="1463040" cy="548640"/>
           </a:xfrm>
           <a:prstGeom prst="rect">
             <a:avLst/>
@@ -3071,7 +2966,7 @@
                 <a:ea typeface="Malgun Gothic" pitchFamily="34" charset="-122"/>
                 <a:cs typeface="Malgun Gothic" pitchFamily="34" charset="-120"/>
               </a:rPr>
-              <a:t>인테리어 시공(10~11월)</a:t>
+              <a:t>인테리어 시공(9~10월)</a:t>
             </a:r>
             <a:endParaRPr lang="en-US" sz="1100" dirty="0"/>
           </a:p>
@@ -3085,8 +2980,8 @@
         </p:nvSpPr>
         <p:spPr>
           <a:xfrm>
-            <a:off x="7132320" y="3291840"/>
-            <a:ext cx="1463040" cy="548640"/>
+            <a:off x="7223760" y="3291840"/>
+            <a:ext cx="1005840" cy="548640"/>
           </a:xfrm>
           <a:prstGeom prst="roundRect">
             <a:avLst>
@@ -3107,8 +3002,8 @@
         </p:nvSpPr>
         <p:spPr>
           <a:xfrm>
-            <a:off x="7132320" y="3291840"/>
-            <a:ext cx="1463040" cy="548640"/>
+            <a:off x="7223760" y="3291840"/>
+            <a:ext cx="1005840" cy="548640"/>
           </a:xfrm>
           <a:prstGeom prst="rect">
             <a:avLst/>
@@ -3132,7 +3027,7 @@
                 <a:ea typeface="Malgun Gothic" pitchFamily="34" charset="-122"/>
                 <a:cs typeface="Malgun Gothic" pitchFamily="34" charset="-120"/>
               </a:rPr>
-              <a:t>가구·무인시스템(11월)</a:t>
+              <a:t>가구·무인시스템(10월)</a:t>
             </a:r>
             <a:endParaRPr lang="en-US" sz="1100" dirty="0"/>
           </a:p>
@@ -3185,8 +3080,8 @@
         </p:nvSpPr>
         <p:spPr>
           <a:xfrm>
-            <a:off x="8686800" y="4160520"/>
-            <a:ext cx="1463040" cy="548640"/>
+            <a:off x="8229600" y="4160520"/>
+            <a:ext cx="1188720" cy="548640"/>
           </a:xfrm>
           <a:prstGeom prst="roundRect">
             <a:avLst>
@@ -3207,8 +3102,8 @@
         </p:nvSpPr>
         <p:spPr>
           <a:xfrm>
-            <a:off x="8686800" y="4160520"/>
-            <a:ext cx="1463040" cy="548640"/>
+            <a:off x="8229600" y="4160520"/>
+            <a:ext cx="1188720" cy="548640"/>
           </a:xfrm>
           <a:prstGeom prst="rect">
             <a:avLst/>
@@ -3232,7 +3127,7 @@
                 <a:ea typeface="Malgun Gothic" pitchFamily="34" charset="-122"/>
                 <a:cs typeface="Malgun Gothic" pitchFamily="34" charset="-120"/>
               </a:rPr>
-              <a:t>마케팅·회원모집(12월)</a:t>
+              <a:t>마케팅·회원모집(11월)</a:t>
             </a:r>
             <a:endParaRPr lang="en-US" sz="1100" dirty="0"/>
           </a:p>
@@ -3246,8 +3141,8 @@
         </p:nvSpPr>
         <p:spPr>
           <a:xfrm>
-            <a:off x="10241280" y="4160520"/>
-            <a:ext cx="1097280" cy="548640"/>
+            <a:off x="9418320" y="4160520"/>
+            <a:ext cx="1005840" cy="548640"/>
           </a:xfrm>
           <a:prstGeom prst="roundRect">
             <a:avLst>
@@ -3268,8 +3163,8 @@
         </p:nvSpPr>
         <p:spPr>
           <a:xfrm>
-            <a:off x="10241280" y="4160520"/>
-            <a:ext cx="1097280" cy="548640"/>
+            <a:off x="9418320" y="4160520"/>
+            <a:ext cx="1005840" cy="548640"/>
           </a:xfrm>
           <a:prstGeom prst="rect">
             <a:avLst/>
@@ -3293,7 +3188,7 @@
                 <a:ea typeface="Malgun Gothic" pitchFamily="34" charset="-122"/>
                 <a:cs typeface="Malgun Gothic" pitchFamily="34" charset="-120"/>
               </a:rPr>
-              <a:t>오픈(목표)</a:t>
+              <a:t>오픈(목표, 11월말)</a:t>
             </a:r>
             <a:endParaRPr lang="en-US" sz="1100" dirty="0"/>
           </a:p>
@@ -3346,8 +3241,8 @@
         </p:nvSpPr>
         <p:spPr>
           <a:xfrm>
-            <a:off x="10241280" y="5029200"/>
-            <a:ext cx="1645920" cy="548640"/>
+            <a:off x="10424160" y="5029200"/>
+            <a:ext cx="1463040" cy="548640"/>
           </a:xfrm>
           <a:prstGeom prst="roundRect">
             <a:avLst>
@@ -3368,8 +3263,8 @@
         </p:nvSpPr>
         <p:spPr>
           <a:xfrm>
-            <a:off x="10241280" y="5029200"/>
-            <a:ext cx="1645920" cy="548640"/>
+            <a:off x="10424160" y="5029200"/>
+            <a:ext cx="1463040" cy="548640"/>
           </a:xfrm>
           <a:prstGeom prst="rect">
             <a:avLst/>
@@ -3444,45 +3339,6 @@
             <a:prstDash val="dash"/>
           </a:ln>
         </p:spPr>
-      </p:sp>
-      <p:sp>
-        <p:nvSpPr>
-          <p:cNvPr id="34" name="Text 32"/>
-          <p:cNvSpPr/>
-          <p:nvPr/>
-        </p:nvSpPr>
-        <p:spPr>
-          <a:xfrm>
-            <a:off x="274320" y="5943600"/>
-            <a:ext cx="11612880" cy="457200"/>
-          </a:xfrm>
-          <a:prstGeom prst="rect">
-            <a:avLst/>
-          </a:prstGeom>
-          <a:noFill/>
-          <a:ln/>
-        </p:spPr>
-        <p:txBody>
-          <a:bodyPr wrap="square" rtlCol="0" anchor="ctr"/>
-          <a:lstStyle/>
-          <a:p>
-            <a:pPr indent="0" marL="0">
-              <a:buNone/>
-            </a:pPr>
-            <a:r>
-              <a:rPr lang="en-US" sz="1100" i="1" dirty="0">
-                <a:solidFill>
-                  <a:srgbClr val="B42318"/>
-                </a:solidFill>
-                <a:latin typeface="Malgun Gothic" pitchFamily="34" charset="0"/>
-                <a:ea typeface="Malgun Gothic" pitchFamily="34" charset="-122"/>
-                <a:cs typeface="Malgun Gothic" pitchFamily="34" charset="-120"/>
-              </a:rPr>
-              <a:t>※ 12월 오픈은 상반기 매물 확정·계약이 예정대로 진행될 때의 목표치. 매물 실사 결과에 따라 1~2개월 지연 가능.</a:t>
-            </a:r>
-            <a:endParaRPr lang="en-US" sz="1100" dirty="0"/>
-          </a:p>
-        </p:txBody>
       </p:sp>
     </p:spTree>
   </p:cSld>

--- a/프로젝트_SOS_주간보고.pptx
+++ b/프로젝트_SOS_주간보고.pptx
@@ -1005,7 +1005,7 @@
         <p:spPr>
           <a:xfrm>
             <a:off x="274320" y="502920"/>
-            <a:ext cx="2834640" cy="777240"/>
+            <a:ext cx="2249424" cy="777240"/>
           </a:xfrm>
           <a:prstGeom prst="roundRect">
             <a:avLst>
@@ -1027,7 +1027,7 @@
         <p:spPr>
           <a:xfrm>
             <a:off x="274320" y="530352"/>
-            <a:ext cx="2834640" cy="365760"/>
+            <a:ext cx="2249424" cy="365760"/>
           </a:xfrm>
           <a:prstGeom prst="rect">
             <a:avLst/>
@@ -1043,7 +1043,124 @@
               <a:buNone/>
             </a:pPr>
             <a:r>
-              <a:rPr lang="en-US" sz="1800" b="1" dirty="0">
+              <a:rPr lang="en-US" sz="1700" b="1" dirty="0">
+                <a:solidFill>
+                  <a:srgbClr val="FFFFFF"/>
+                </a:solidFill>
+                <a:latin typeface="Malgun Gothic" pitchFamily="34" charset="0"/>
+                <a:ea typeface="Malgun Gothic" pitchFamily="34" charset="-122"/>
+                <a:cs typeface="Malgun Gothic" pitchFamily="34" charset="-120"/>
+              </a:rPr>
+              <a:t>3곳</a:t>
+            </a:r>
+            <a:endParaRPr lang="en-US" sz="1700" dirty="0"/>
+          </a:p>
+        </p:txBody>
+      </p:sp>
+      <p:sp>
+        <p:nvSpPr>
+          <p:cNvPr id="5" name="Text 3"/>
+          <p:cNvSpPr/>
+          <p:nvPr/>
+        </p:nvSpPr>
+        <p:spPr>
+          <a:xfrm>
+            <a:off x="274320" y="868680"/>
+            <a:ext cx="2249424" cy="384048"/>
+          </a:xfrm>
+          <a:prstGeom prst="rect">
+            <a:avLst/>
+          </a:prstGeom>
+          <a:noFill/>
+          <a:ln/>
+        </p:spPr>
+        <p:txBody>
+          <a:bodyPr wrap="square" rtlCol="0" anchor="ctr"/>
+          <a:lstStyle/>
+          <a:p>
+            <a:pPr algn="ctr" indent="0" marL="0">
+              <a:buNone/>
+            </a:pPr>
+            <a:r>
+              <a:rPr lang="en-US" sz="800" dirty="0">
+                <a:solidFill>
+                  <a:srgbClr val="D9E2F3"/>
+                </a:solidFill>
+                <a:latin typeface="Malgun Gothic" pitchFamily="34" charset="0"/>
+                <a:ea typeface="Malgun Gothic" pitchFamily="34" charset="-122"/>
+                <a:cs typeface="Malgun Gothic" pitchFamily="34" charset="-120"/>
+              </a:rPr>
+              <a:t>경쟁사 현장 방문·상담</a:t>
+            </a:r>
+            <a:endParaRPr lang="en-US" sz="800" dirty="0"/>
+          </a:p>
+          <a:p>
+            <a:pPr algn="ctr" indent="0" marL="0">
+              <a:buNone/>
+            </a:pPr>
+            <a:r>
+              <a:rPr lang="en-US" sz="800" dirty="0">
+                <a:solidFill>
+                  <a:srgbClr val="D9E2F3"/>
+                </a:solidFill>
+                <a:latin typeface="Malgun Gothic" pitchFamily="34" charset="0"/>
+                <a:ea typeface="Malgun Gothic" pitchFamily="34" charset="-122"/>
+                <a:cs typeface="Malgun Gothic" pitchFamily="34" charset="-120"/>
+              </a:rPr>
+              <a:t>(분당SP·판교FF·여의도SP)</a:t>
+            </a:r>
+            <a:endParaRPr lang="en-US" sz="800" dirty="0"/>
+          </a:p>
+        </p:txBody>
+      </p:sp>
+      <p:sp>
+        <p:nvSpPr>
+          <p:cNvPr id="6" name="Shape 4"/>
+          <p:cNvSpPr/>
+          <p:nvPr/>
+        </p:nvSpPr>
+        <p:spPr>
+          <a:xfrm>
+            <a:off x="2615184" y="502920"/>
+            <a:ext cx="2249424" cy="777240"/>
+          </a:xfrm>
+          <a:prstGeom prst="roundRect">
+            <a:avLst>
+              <a:gd name="adj" fmla="val 7059"/>
+            </a:avLst>
+          </a:prstGeom>
+          <a:solidFill>
+            <a:srgbClr val="1F4F99"/>
+          </a:solidFill>
+          <a:ln/>
+        </p:spPr>
+      </p:sp>
+      <p:sp>
+        <p:nvSpPr>
+          <p:cNvPr id="7" name="Text 5"/>
+          <p:cNvSpPr/>
+          <p:nvPr/>
+        </p:nvSpPr>
+        <p:spPr>
+          <a:xfrm>
+            <a:off x="2615184" y="530352"/>
+            <a:ext cx="2249424" cy="365760"/>
+          </a:xfrm>
+          <a:prstGeom prst="rect">
+            <a:avLst/>
+          </a:prstGeom>
+          <a:noFill/>
+          <a:ln/>
+        </p:spPr>
+        <p:txBody>
+          <a:bodyPr wrap="square" rtlCol="0" anchor="ctr"/>
+          <a:lstStyle/>
+          <a:p>
+            <a:pPr algn="ctr" indent="0" marL="0">
+              <a:buNone/>
+            </a:pPr>
+            <a:r>
+              <a:rPr lang="en-US" sz="1700" b="1" dirty="0">
                 <a:solidFill>
                   <a:srgbClr val="FFFFFF"/>
                 </a:solidFill>
@@ -1053,20 +1170,20 @@
               </a:rPr>
               <a:t>5종</a:t>
             </a:r>
-            <a:endParaRPr lang="en-US" sz="1800" dirty="0"/>
-          </a:p>
-        </p:txBody>
-      </p:sp>
-      <p:sp>
-        <p:nvSpPr>
-          <p:cNvPr id="5" name="Text 3"/>
-          <p:cNvSpPr/>
-          <p:nvPr/>
-        </p:nvSpPr>
-        <p:spPr>
-          <a:xfrm>
-            <a:off x="274320" y="868680"/>
-            <a:ext cx="2834640" cy="384048"/>
+            <a:endParaRPr lang="en-US" sz="1700" dirty="0"/>
+          </a:p>
+        </p:txBody>
+      </p:sp>
+      <p:sp>
+        <p:nvSpPr>
+          <p:cNvPr id="8" name="Text 6"/>
+          <p:cNvSpPr/>
+          <p:nvPr/>
+        </p:nvSpPr>
+        <p:spPr>
+          <a:xfrm>
+            <a:off x="2615184" y="868680"/>
+            <a:ext cx="2249424" cy="384048"/>
           </a:xfrm>
           <a:prstGeom prst="rect">
             <a:avLst/>
@@ -1082,7 +1199,7 @@
               <a:buNone/>
             </a:pPr>
             <a:r>
-              <a:rPr lang="en-US" sz="850" dirty="0">
+              <a:rPr lang="en-US" sz="800" dirty="0">
                 <a:solidFill>
                   <a:srgbClr val="D9E2F3"/>
                 </a:solidFill>
@@ -1092,14 +1209,14 @@
               </a:rPr>
               <a:t>문서 산출물</a:t>
             </a:r>
-            <a:endParaRPr lang="en-US" sz="850" dirty="0"/>
+            <a:endParaRPr lang="en-US" sz="800" dirty="0"/>
           </a:p>
           <a:p>
             <a:pPr algn="ctr" indent="0" marL="0">
               <a:buNone/>
             </a:pPr>
             <a:r>
-              <a:rPr lang="en-US" sz="850" dirty="0">
+              <a:rPr lang="en-US" sz="800" dirty="0">
                 <a:solidFill>
                   <a:srgbClr val="D9E2F3"/>
                 </a:solidFill>
@@ -1109,20 +1226,20 @@
               </a:rPr>
               <a:t>(HTML·Excel·Word·PPT×2)</a:t>
             </a:r>
-            <a:endParaRPr lang="en-US" sz="850" dirty="0"/>
-          </a:p>
-        </p:txBody>
-      </p:sp>
-      <p:sp>
-        <p:nvSpPr>
-          <p:cNvPr id="6" name="Shape 4"/>
-          <p:cNvSpPr/>
-          <p:nvPr/>
-        </p:nvSpPr>
-        <p:spPr>
-          <a:xfrm>
-            <a:off x="3200400" y="502920"/>
-            <a:ext cx="2834640" cy="777240"/>
+            <a:endParaRPr lang="en-US" sz="800" dirty="0"/>
+          </a:p>
+        </p:txBody>
+      </p:sp>
+      <p:sp>
+        <p:nvSpPr>
+          <p:cNvPr id="9" name="Shape 7"/>
+          <p:cNvSpPr/>
+          <p:nvPr/>
+        </p:nvSpPr>
+        <p:spPr>
+          <a:xfrm>
+            <a:off x="4956048" y="502920"/>
+            <a:ext cx="2249424" cy="777240"/>
           </a:xfrm>
           <a:prstGeom prst="roundRect">
             <a:avLst>
@@ -1137,14 +1254,14 @@
       </p:sp>
       <p:sp>
         <p:nvSpPr>
-          <p:cNvPr id="7" name="Text 5"/>
-          <p:cNvSpPr/>
-          <p:nvPr/>
-        </p:nvSpPr>
-        <p:spPr>
-          <a:xfrm>
-            <a:off x="3200400" y="530352"/>
-            <a:ext cx="2834640" cy="365760"/>
+          <p:cNvPr id="10" name="Text 8"/>
+          <p:cNvSpPr/>
+          <p:nvPr/>
+        </p:nvSpPr>
+        <p:spPr>
+          <a:xfrm>
+            <a:off x="4956048" y="530352"/>
+            <a:ext cx="2249424" cy="365760"/>
           </a:xfrm>
           <a:prstGeom prst="rect">
             <a:avLst/>
@@ -1160,7 +1277,7 @@
               <a:buNone/>
             </a:pPr>
             <a:r>
-              <a:rPr lang="en-US" sz="1800" b="1" dirty="0">
+              <a:rPr lang="en-US" sz="1700" b="1" dirty="0">
                 <a:solidFill>
                   <a:srgbClr val="FFFFFF"/>
                 </a:solidFill>
@@ -1170,20 +1287,20 @@
               </a:rPr>
               <a:t>20개</a:t>
             </a:r>
-            <a:endParaRPr lang="en-US" sz="1800" dirty="0"/>
-          </a:p>
-        </p:txBody>
-      </p:sp>
-      <p:sp>
-        <p:nvSpPr>
-          <p:cNvPr id="8" name="Text 6"/>
-          <p:cNvSpPr/>
-          <p:nvPr/>
-        </p:nvSpPr>
-        <p:spPr>
-          <a:xfrm>
-            <a:off x="3200400" y="868680"/>
-            <a:ext cx="2834640" cy="384048"/>
+            <a:endParaRPr lang="en-US" sz="1700" dirty="0"/>
+          </a:p>
+        </p:txBody>
+      </p:sp>
+      <p:sp>
+        <p:nvSpPr>
+          <p:cNvPr id="11" name="Text 9"/>
+          <p:cNvSpPr/>
+          <p:nvPr/>
+        </p:nvSpPr>
+        <p:spPr>
+          <a:xfrm>
+            <a:off x="4956048" y="868680"/>
+            <a:ext cx="2249424" cy="384048"/>
           </a:xfrm>
           <a:prstGeom prst="rect">
             <a:avLst/>
@@ -1199,7 +1316,7 @@
               <a:buNone/>
             </a:pPr>
             <a:r>
-              <a:rPr lang="en-US" sz="850" dirty="0">
+              <a:rPr lang="en-US" sz="800" dirty="0">
                 <a:solidFill>
                   <a:srgbClr val="D9E2F3"/>
                 </a:solidFill>
@@ -1209,14 +1326,14 @@
               </a:rPr>
               <a:t>보고서 표·계산식</a:t>
             </a:r>
-            <a:endParaRPr lang="en-US" sz="850" dirty="0"/>
+            <a:endParaRPr lang="en-US" sz="800" dirty="0"/>
           </a:p>
           <a:p>
             <a:pPr algn="ctr" indent="0" marL="0">
               <a:buNone/>
             </a:pPr>
             <a:r>
-              <a:rPr lang="en-US" sz="850" dirty="0">
+              <a:rPr lang="en-US" sz="800" dirty="0">
                 <a:solidFill>
                   <a:srgbClr val="D9E2F3"/>
                 </a:solidFill>
@@ -1226,20 +1343,20 @@
               </a:rPr>
               <a:t>전면 재검증</a:t>
             </a:r>
-            <a:endParaRPr lang="en-US" sz="850" dirty="0"/>
-          </a:p>
-        </p:txBody>
-      </p:sp>
-      <p:sp>
-        <p:nvSpPr>
-          <p:cNvPr id="9" name="Shape 7"/>
-          <p:cNvSpPr/>
-          <p:nvPr/>
-        </p:nvSpPr>
-        <p:spPr>
-          <a:xfrm>
-            <a:off x="6126480" y="502920"/>
-            <a:ext cx="2834640" cy="777240"/>
+            <a:endParaRPr lang="en-US" sz="800" dirty="0"/>
+          </a:p>
+        </p:txBody>
+      </p:sp>
+      <p:sp>
+        <p:nvSpPr>
+          <p:cNvPr id="12" name="Shape 10"/>
+          <p:cNvSpPr/>
+          <p:nvPr/>
+        </p:nvSpPr>
+        <p:spPr>
+          <a:xfrm>
+            <a:off x="7296912" y="502920"/>
+            <a:ext cx="2249424" cy="777240"/>
           </a:xfrm>
           <a:prstGeom prst="roundRect">
             <a:avLst>
@@ -1254,14 +1371,14 @@
       </p:sp>
       <p:sp>
         <p:nvSpPr>
-          <p:cNvPr id="10" name="Text 8"/>
-          <p:cNvSpPr/>
-          <p:nvPr/>
-        </p:nvSpPr>
-        <p:spPr>
-          <a:xfrm>
-            <a:off x="6126480" y="530352"/>
-            <a:ext cx="2834640" cy="365760"/>
+          <p:cNvPr id="13" name="Text 11"/>
+          <p:cNvSpPr/>
+          <p:nvPr/>
+        </p:nvSpPr>
+        <p:spPr>
+          <a:xfrm>
+            <a:off x="7296912" y="530352"/>
+            <a:ext cx="2249424" cy="365760"/>
           </a:xfrm>
           <a:prstGeom prst="rect">
             <a:avLst/>
@@ -1277,7 +1394,7 @@
               <a:buNone/>
             </a:pPr>
             <a:r>
-              <a:rPr lang="en-US" sz="1800" b="1" dirty="0">
+              <a:rPr lang="en-US" sz="1700" b="1" dirty="0">
                 <a:solidFill>
                   <a:srgbClr val="FFFFFF"/>
                 </a:solidFill>
@@ -1287,20 +1404,20 @@
               </a:rPr>
               <a:t>4개</a:t>
             </a:r>
-            <a:endParaRPr lang="en-US" sz="1800" dirty="0"/>
-          </a:p>
-        </p:txBody>
-      </p:sp>
-      <p:sp>
-        <p:nvSpPr>
-          <p:cNvPr id="11" name="Text 9"/>
-          <p:cNvSpPr/>
-          <p:nvPr/>
-        </p:nvSpPr>
-        <p:spPr>
-          <a:xfrm>
-            <a:off x="6126480" y="868680"/>
-            <a:ext cx="2834640" cy="384048"/>
+            <a:endParaRPr lang="en-US" sz="1700" dirty="0"/>
+          </a:p>
+        </p:txBody>
+      </p:sp>
+      <p:sp>
+        <p:nvSpPr>
+          <p:cNvPr id="14" name="Text 12"/>
+          <p:cNvSpPr/>
+          <p:nvPr/>
+        </p:nvSpPr>
+        <p:spPr>
+          <a:xfrm>
+            <a:off x="7296912" y="868680"/>
+            <a:ext cx="2249424" cy="384048"/>
           </a:xfrm>
           <a:prstGeom prst="rect">
             <a:avLst/>
@@ -1316,7 +1433,7 @@
               <a:buNone/>
             </a:pPr>
             <a:r>
-              <a:rPr lang="en-US" sz="850" dirty="0">
+              <a:rPr lang="en-US" sz="800" dirty="0">
                 <a:solidFill>
                   <a:srgbClr val="D9E2F3"/>
                 </a:solidFill>
@@ -1326,14 +1443,14 @@
               </a:rPr>
               <a:t>모델 전체 재계산</a:t>
             </a:r>
-            <a:endParaRPr lang="en-US" sz="850" dirty="0"/>
+            <a:endParaRPr lang="en-US" sz="800" dirty="0"/>
           </a:p>
           <a:p>
             <a:pPr algn="ctr" indent="0" marL="0">
               <a:buNone/>
             </a:pPr>
             <a:r>
-              <a:rPr lang="en-US" sz="850" dirty="0">
+              <a:rPr lang="en-US" sz="800" dirty="0">
                 <a:solidFill>
                   <a:srgbClr val="D9E2F3"/>
                 </a:solidFill>
@@ -1343,20 +1460,20 @@
               </a:rPr>
               <a:t>(100·120·150평·판교)</a:t>
             </a:r>
-            <a:endParaRPr lang="en-US" sz="850" dirty="0"/>
-          </a:p>
-        </p:txBody>
-      </p:sp>
-      <p:sp>
-        <p:nvSpPr>
-          <p:cNvPr id="12" name="Shape 10"/>
-          <p:cNvSpPr/>
-          <p:nvPr/>
-        </p:nvSpPr>
-        <p:spPr>
-          <a:xfrm>
-            <a:off x="9052560" y="502920"/>
-            <a:ext cx="2834640" cy="777240"/>
+            <a:endParaRPr lang="en-US" sz="800" dirty="0"/>
+          </a:p>
+        </p:txBody>
+      </p:sp>
+      <p:sp>
+        <p:nvSpPr>
+          <p:cNvPr id="15" name="Shape 13"/>
+          <p:cNvSpPr/>
+          <p:nvPr/>
+        </p:nvSpPr>
+        <p:spPr>
+          <a:xfrm>
+            <a:off x="9637776" y="502920"/>
+            <a:ext cx="2249424" cy="777240"/>
           </a:xfrm>
           <a:prstGeom prst="roundRect">
             <a:avLst>
@@ -1371,14 +1488,14 @@
       </p:sp>
       <p:sp>
         <p:nvSpPr>
-          <p:cNvPr id="13" name="Text 11"/>
-          <p:cNvSpPr/>
-          <p:nvPr/>
-        </p:nvSpPr>
-        <p:spPr>
-          <a:xfrm>
-            <a:off x="9052560" y="530352"/>
-            <a:ext cx="2834640" cy="365760"/>
+          <p:cNvPr id="16" name="Text 14"/>
+          <p:cNvSpPr/>
+          <p:nvPr/>
+        </p:nvSpPr>
+        <p:spPr>
+          <a:xfrm>
+            <a:off x="9637776" y="530352"/>
+            <a:ext cx="2249424" cy="365760"/>
           </a:xfrm>
           <a:prstGeom prst="rect">
             <a:avLst/>
@@ -1394,7 +1511,7 @@
               <a:buNone/>
             </a:pPr>
             <a:r>
-              <a:rPr lang="en-US" sz="1800" b="1" dirty="0">
+              <a:rPr lang="en-US" sz="1700" b="1" dirty="0">
                 <a:solidFill>
                   <a:srgbClr val="FFFFFF"/>
                 </a:solidFill>
@@ -1404,20 +1521,20 @@
               </a:rPr>
               <a:t>3건</a:t>
             </a:r>
-            <a:endParaRPr lang="en-US" sz="1800" dirty="0"/>
-          </a:p>
-        </p:txBody>
-      </p:sp>
-      <p:sp>
-        <p:nvSpPr>
-          <p:cNvPr id="14" name="Text 12"/>
-          <p:cNvSpPr/>
-          <p:nvPr/>
-        </p:nvSpPr>
-        <p:spPr>
-          <a:xfrm>
-            <a:off x="9052560" y="868680"/>
-            <a:ext cx="2834640" cy="384048"/>
+            <a:endParaRPr lang="en-US" sz="1700" dirty="0"/>
+          </a:p>
+        </p:txBody>
+      </p:sp>
+      <p:sp>
+        <p:nvSpPr>
+          <p:cNvPr id="17" name="Text 15"/>
+          <p:cNvSpPr/>
+          <p:nvPr/>
+        </p:nvSpPr>
+        <p:spPr>
+          <a:xfrm>
+            <a:off x="9637776" y="868680"/>
+            <a:ext cx="2249424" cy="384048"/>
           </a:xfrm>
           <a:prstGeom prst="rect">
             <a:avLst/>
@@ -1433,7 +1550,7 @@
               <a:buNone/>
             </a:pPr>
             <a:r>
-              <a:rPr lang="en-US" sz="850" dirty="0">
+              <a:rPr lang="en-US" sz="800" dirty="0">
                 <a:solidFill>
                   <a:srgbClr val="D9E2F3"/>
                 </a:solidFill>
@@ -1443,14 +1560,14 @@
               </a:rPr>
               <a:t>실측 견적서 확보</a:t>
             </a:r>
-            <a:endParaRPr lang="en-US" sz="850" dirty="0"/>
+            <a:endParaRPr lang="en-US" sz="800" dirty="0"/>
           </a:p>
           <a:p>
             <a:pPr algn="ctr" indent="0" marL="0">
               <a:buNone/>
             </a:pPr>
             <a:r>
-              <a:rPr lang="en-US" sz="850" dirty="0">
+              <a:rPr lang="en-US" sz="800" dirty="0">
                 <a:solidFill>
                   <a:srgbClr val="D9E2F3"/>
                 </a:solidFill>
@@ -1460,7 +1577,7 @@
               </a:rPr>
               <a:t>(전기·냉난방·소방)</a:t>
             </a:r>
-            <a:endParaRPr lang="en-US" sz="850" dirty="0"/>
+            <a:endParaRPr lang="en-US" sz="800" dirty="0"/>
           </a:p>
         </p:txBody>
       </p:sp>
@@ -1743,7 +1860,7 @@
                           <a:ea typeface="Malgun Gothic" pitchFamily="34" charset="-122"/>
                           <a:cs typeface="Malgun Gothic" pitchFamily="34" charset="-120"/>
                         </a:rPr>
-                        <a:t>경쟁사 실계약·제안서 자료 확보 및 대조</a:t>
+                        <a:t>경쟁사 현장 상담·방문 및 실자료 확보</a:t>
                       </a:r>
                       <a:endParaRPr lang="en-US" sz="1200" dirty="0"/>
                     </a:p>
@@ -1764,7 +1881,49 @@
                           <a:ea typeface="Malgun Gothic" pitchFamily="34" charset="-122"/>
                           <a:cs typeface="Malgun Gothic" pitchFamily="34" charset="-120"/>
                         </a:rPr>
-                        <a:t>스파크플러스·패스트파이브 실계약서·입주제안서 확보(분당2호점·여의도 등) 및 실거래가·크레딧 조건 검증</a:t>
+                        <a:t>분당 스파크플러스, 판교 패스트파이브 상담 및 견적 확인</a:t>
+                      </a:r>
+                      <a:endParaRPr lang="en-US" sz="1200" dirty="0"/>
+                    </a:p>
+                    <a:p>
+                      <a:pPr lvl="1" marL="685800" indent="-342900">
+                        <a:spcAft>
+                          <a:spcPts val="300"/>
+                        </a:spcAft>
+                        <a:buSzPct val="100000"/>
+                        <a:buChar char="▸"/>
+                      </a:pPr>
+                      <a:r>
+                        <a:rPr lang="en-US" sz="1050" dirty="0">
+                          <a:solidFill>
+                            <a:srgbClr val="1F2937"/>
+                          </a:solidFill>
+                          <a:latin typeface="Malgun Gothic" pitchFamily="34" charset="0"/>
+                          <a:ea typeface="Malgun Gothic" pitchFamily="34" charset="-122"/>
+                          <a:cs typeface="Malgun Gothic" pitchFamily="34" charset="-120"/>
+                        </a:rPr>
+                        <a:t>여의도 스파크플러스 현장 방문 및 수치·견적 확인</a:t>
+                      </a:r>
+                      <a:endParaRPr lang="en-US" sz="1200" dirty="0"/>
+                    </a:p>
+                    <a:p>
+                      <a:pPr lvl="1" marL="685800" indent="-342900">
+                        <a:spcAft>
+                          <a:spcPts val="300"/>
+                        </a:spcAft>
+                        <a:buSzPct val="100000"/>
+                        <a:buChar char="▸"/>
+                      </a:pPr>
+                      <a:r>
+                        <a:rPr lang="en-US" sz="1050" dirty="0">
+                          <a:solidFill>
+                            <a:srgbClr val="1F2937"/>
+                          </a:solidFill>
+                          <a:latin typeface="Malgun Gothic" pitchFamily="34" charset="0"/>
+                          <a:ea typeface="Malgun Gothic" pitchFamily="34" charset="-122"/>
+                          <a:cs typeface="Malgun Gothic" pitchFamily="34" charset="-120"/>
+                        </a:rPr>
+                        <a:t>확보한 실계약서·입주제안서로 실거래가·크레딧 조건 대조 검증(분당2호점·여의도 등)</a:t>
                       </a:r>
                       <a:endParaRPr lang="en-US" sz="1200" dirty="0"/>
                     </a:p>

--- a/프로젝트_SOS_주간보고.pptx
+++ b/프로젝트_SOS_주간보고.pptx
@@ -2903,7 +2903,7 @@
                 <a:ea typeface="Malgun Gothic" pitchFamily="34" charset="-122"/>
                 <a:cs typeface="Malgun Gothic" pitchFamily="34" charset="-120"/>
               </a:rPr>
-              <a:t>매물 확보・계약</a:t>
+              <a:t>마케팅 계획・실무 논의</a:t>
             </a:r>
             <a:endParaRPr lang="en-US" sz="1150" dirty="0"/>
           </a:p>
@@ -2918,7 +2918,7 @@
         <p:spPr>
           <a:xfrm>
             <a:off x="3566160" y="2423160"/>
-            <a:ext cx="1188720" cy="548640"/>
+            <a:ext cx="2194560" cy="548640"/>
           </a:xfrm>
           <a:prstGeom prst="roundRect">
             <a:avLst>
@@ -2926,6 +2926,106 @@
             </a:avLst>
           </a:prstGeom>
           <a:solidFill>
+            <a:srgbClr val="5B7FBF"/>
+          </a:solidFill>
+          <a:ln/>
+        </p:spPr>
+      </p:sp>
+      <p:sp>
+        <p:nvSpPr>
+          <p:cNvPr id="16" name="Text 14"/>
+          <p:cNvSpPr/>
+          <p:nvPr/>
+        </p:nvSpPr>
+        <p:spPr>
+          <a:xfrm>
+            <a:off x="3566160" y="2423160"/>
+            <a:ext cx="2194560" cy="548640"/>
+          </a:xfrm>
+          <a:prstGeom prst="rect">
+            <a:avLst/>
+          </a:prstGeom>
+          <a:noFill/>
+          <a:ln/>
+        </p:spPr>
+        <p:txBody>
+          <a:bodyPr wrap="square" rtlCol="0" anchor="ctr"/>
+          <a:lstStyle/>
+          <a:p>
+            <a:pPr algn="ctr" indent="0" marL="0">
+              <a:buNone/>
+            </a:pPr>
+            <a:r>
+              <a:rPr lang="en-US" sz="1100" b="1" dirty="0">
+                <a:solidFill>
+                  <a:srgbClr val="FFFFFF"/>
+                </a:solidFill>
+                <a:latin typeface="Malgun Gothic" pitchFamily="34" charset="0"/>
+                <a:ea typeface="Malgun Gothic" pitchFamily="34" charset="-122"/>
+                <a:cs typeface="Malgun Gothic" pitchFamily="34" charset="-120"/>
+              </a:rPr>
+              <a:t>마케팅 계획 구체화·실무 협의(7월말~8월)</a:t>
+            </a:r>
+            <a:endParaRPr lang="en-US" sz="1100" dirty="0"/>
+          </a:p>
+        </p:txBody>
+      </p:sp>
+      <p:sp>
+        <p:nvSpPr>
+          <p:cNvPr id="17" name="Text 15"/>
+          <p:cNvSpPr/>
+          <p:nvPr/>
+        </p:nvSpPr>
+        <p:spPr>
+          <a:xfrm>
+            <a:off x="274320" y="3291840"/>
+            <a:ext cx="1371600" cy="548640"/>
+          </a:xfrm>
+          <a:prstGeom prst="rect">
+            <a:avLst/>
+          </a:prstGeom>
+          <a:noFill/>
+          <a:ln/>
+        </p:spPr>
+        <p:txBody>
+          <a:bodyPr wrap="square" rtlCol="0" anchor="ctr"/>
+          <a:lstStyle/>
+          <a:p>
+            <a:pPr indent="0" marL="0">
+              <a:buNone/>
+            </a:pPr>
+            <a:r>
+              <a:rPr lang="en-US" sz="1150" b="1" dirty="0">
+                <a:solidFill>
+                  <a:srgbClr val="0F1E3D"/>
+                </a:solidFill>
+                <a:latin typeface="Malgun Gothic" pitchFamily="34" charset="0"/>
+                <a:ea typeface="Malgun Gothic" pitchFamily="34" charset="-122"/>
+                <a:cs typeface="Malgun Gothic" pitchFamily="34" charset="-120"/>
+              </a:rPr>
+              <a:t>매물 확보・계약</a:t>
+            </a:r>
+            <a:endParaRPr lang="en-US" sz="1150" dirty="0"/>
+          </a:p>
+        </p:txBody>
+      </p:sp>
+      <p:sp>
+        <p:nvSpPr>
+          <p:cNvPr id="18" name="Shape 16"/>
+          <p:cNvSpPr/>
+          <p:nvPr/>
+        </p:nvSpPr>
+        <p:spPr>
+          <a:xfrm>
+            <a:off x="3566160" y="3291840"/>
+            <a:ext cx="1188720" cy="548640"/>
+          </a:xfrm>
+          <a:prstGeom prst="roundRect">
+            <a:avLst>
+              <a:gd name="adj" fmla="val 10000"/>
+            </a:avLst>
+          </a:prstGeom>
+          <a:solidFill>
             <a:srgbClr val="2E5FA8"/>
           </a:solidFill>
           <a:ln/>
@@ -2933,13 +3033,13 @@
       </p:sp>
       <p:sp>
         <p:nvSpPr>
-          <p:cNvPr id="16" name="Text 14"/>
-          <p:cNvSpPr/>
-          <p:nvPr/>
-        </p:nvSpPr>
-        <p:spPr>
-          <a:xfrm>
-            <a:off x="3566160" y="2423160"/>
+          <p:cNvPr id="19" name="Text 17"/>
+          <p:cNvSpPr/>
+          <p:nvPr/>
+        </p:nvSpPr>
+        <p:spPr>
+          <a:xfrm>
+            <a:off x="3566160" y="3291840"/>
             <a:ext cx="1188720" cy="548640"/>
           </a:xfrm>
           <a:prstGeom prst="rect">
@@ -2972,13 +3072,13 @@
       </p:sp>
       <p:sp>
         <p:nvSpPr>
-          <p:cNvPr id="17" name="Shape 15"/>
-          <p:cNvSpPr/>
-          <p:nvPr/>
-        </p:nvSpPr>
-        <p:spPr>
-          <a:xfrm>
-            <a:off x="4754880" y="2423160"/>
+          <p:cNvPr id="20" name="Shape 18"/>
+          <p:cNvSpPr/>
+          <p:nvPr/>
+        </p:nvSpPr>
+        <p:spPr>
+          <a:xfrm>
+            <a:off x="4754880" y="3291840"/>
             <a:ext cx="1005840" cy="548640"/>
           </a:xfrm>
           <a:prstGeom prst="roundRect">
@@ -2994,13 +3094,13 @@
       </p:sp>
       <p:sp>
         <p:nvSpPr>
-          <p:cNvPr id="18" name="Text 16"/>
-          <p:cNvSpPr/>
-          <p:nvPr/>
-        </p:nvSpPr>
-        <p:spPr>
-          <a:xfrm>
-            <a:off x="4754880" y="2423160"/>
+          <p:cNvPr id="21" name="Text 19"/>
+          <p:cNvSpPr/>
+          <p:nvPr/>
+        </p:nvSpPr>
+        <p:spPr>
+          <a:xfrm>
+            <a:off x="4754880" y="3291840"/>
             <a:ext cx="1005840" cy="548640"/>
           </a:xfrm>
           <a:prstGeom prst="rect">
@@ -3033,13 +3133,13 @@
       </p:sp>
       <p:sp>
         <p:nvSpPr>
-          <p:cNvPr id="19" name="Text 17"/>
-          <p:cNvSpPr/>
-          <p:nvPr/>
-        </p:nvSpPr>
-        <p:spPr>
-          <a:xfrm>
-            <a:off x="274320" y="3291840"/>
+          <p:cNvPr id="22" name="Text 20"/>
+          <p:cNvSpPr/>
+          <p:nvPr/>
+        </p:nvSpPr>
+        <p:spPr>
+          <a:xfrm>
+            <a:off x="274320" y="4160520"/>
             <a:ext cx="1371600" cy="548640"/>
           </a:xfrm>
           <a:prstGeom prst="rect">
@@ -3072,13 +3172,13 @@
       </p:sp>
       <p:sp>
         <p:nvSpPr>
-          <p:cNvPr id="20" name="Shape 18"/>
-          <p:cNvSpPr/>
-          <p:nvPr/>
-        </p:nvSpPr>
-        <p:spPr>
-          <a:xfrm>
-            <a:off x="5760720" y="3291840"/>
+          <p:cNvPr id="23" name="Shape 21"/>
+          <p:cNvSpPr/>
+          <p:nvPr/>
+        </p:nvSpPr>
+        <p:spPr>
+          <a:xfrm>
+            <a:off x="5760720" y="4160520"/>
             <a:ext cx="1463040" cy="548640"/>
           </a:xfrm>
           <a:prstGeom prst="roundRect">
@@ -3094,13 +3194,13 @@
       </p:sp>
       <p:sp>
         <p:nvSpPr>
-          <p:cNvPr id="21" name="Text 19"/>
-          <p:cNvSpPr/>
-          <p:nvPr/>
-        </p:nvSpPr>
-        <p:spPr>
-          <a:xfrm>
-            <a:off x="5760720" y="3291840"/>
+          <p:cNvPr id="24" name="Text 22"/>
+          <p:cNvSpPr/>
+          <p:nvPr/>
+        </p:nvSpPr>
+        <p:spPr>
+          <a:xfrm>
+            <a:off x="5760720" y="4160520"/>
             <a:ext cx="1463040" cy="548640"/>
           </a:xfrm>
           <a:prstGeom prst="rect">
@@ -3133,13 +3233,13 @@
       </p:sp>
       <p:sp>
         <p:nvSpPr>
-          <p:cNvPr id="22" name="Shape 20"/>
-          <p:cNvSpPr/>
-          <p:nvPr/>
-        </p:nvSpPr>
-        <p:spPr>
-          <a:xfrm>
-            <a:off x="7223760" y="3291840"/>
+          <p:cNvPr id="25" name="Shape 23"/>
+          <p:cNvSpPr/>
+          <p:nvPr/>
+        </p:nvSpPr>
+        <p:spPr>
+          <a:xfrm>
+            <a:off x="7223760" y="4160520"/>
             <a:ext cx="1005840" cy="548640"/>
           </a:xfrm>
           <a:prstGeom prst="roundRect">
@@ -3155,13 +3255,13 @@
       </p:sp>
       <p:sp>
         <p:nvSpPr>
-          <p:cNvPr id="23" name="Text 21"/>
-          <p:cNvSpPr/>
-          <p:nvPr/>
-        </p:nvSpPr>
-        <p:spPr>
-          <a:xfrm>
-            <a:off x="7223760" y="3291840"/>
+          <p:cNvPr id="26" name="Text 24"/>
+          <p:cNvSpPr/>
+          <p:nvPr/>
+        </p:nvSpPr>
+        <p:spPr>
+          <a:xfrm>
+            <a:off x="7223760" y="4160520"/>
             <a:ext cx="1005840" cy="548640"/>
           </a:xfrm>
           <a:prstGeom prst="rect">
@@ -3194,13 +3294,13 @@
       </p:sp>
       <p:sp>
         <p:nvSpPr>
-          <p:cNvPr id="24" name="Text 22"/>
-          <p:cNvSpPr/>
-          <p:nvPr/>
-        </p:nvSpPr>
-        <p:spPr>
-          <a:xfrm>
-            <a:off x="274320" y="4160520"/>
+          <p:cNvPr id="27" name="Text 25"/>
+          <p:cNvSpPr/>
+          <p:nvPr/>
+        </p:nvSpPr>
+        <p:spPr>
+          <a:xfrm>
+            <a:off x="274320" y="5029200"/>
             <a:ext cx="1371600" cy="548640"/>
           </a:xfrm>
           <a:prstGeom prst="rect">
@@ -3233,13 +3333,13 @@
       </p:sp>
       <p:sp>
         <p:nvSpPr>
-          <p:cNvPr id="25" name="Shape 23"/>
-          <p:cNvSpPr/>
-          <p:nvPr/>
-        </p:nvSpPr>
-        <p:spPr>
-          <a:xfrm>
-            <a:off x="8229600" y="4160520"/>
+          <p:cNvPr id="28" name="Shape 26"/>
+          <p:cNvSpPr/>
+          <p:nvPr/>
+        </p:nvSpPr>
+        <p:spPr>
+          <a:xfrm>
+            <a:off x="8229600" y="5029200"/>
             <a:ext cx="1188720" cy="548640"/>
           </a:xfrm>
           <a:prstGeom prst="roundRect">
@@ -3255,13 +3355,13 @@
       </p:sp>
       <p:sp>
         <p:nvSpPr>
-          <p:cNvPr id="26" name="Text 24"/>
-          <p:cNvSpPr/>
-          <p:nvPr/>
-        </p:nvSpPr>
-        <p:spPr>
-          <a:xfrm>
-            <a:off x="8229600" y="4160520"/>
+          <p:cNvPr id="29" name="Text 27"/>
+          <p:cNvSpPr/>
+          <p:nvPr/>
+        </p:nvSpPr>
+        <p:spPr>
+          <a:xfrm>
+            <a:off x="8229600" y="5029200"/>
             <a:ext cx="1188720" cy="548640"/>
           </a:xfrm>
           <a:prstGeom prst="rect">
@@ -3294,13 +3394,13 @@
       </p:sp>
       <p:sp>
         <p:nvSpPr>
-          <p:cNvPr id="27" name="Shape 25"/>
-          <p:cNvSpPr/>
-          <p:nvPr/>
-        </p:nvSpPr>
-        <p:spPr>
-          <a:xfrm>
-            <a:off x="9418320" y="4160520"/>
+          <p:cNvPr id="30" name="Shape 28"/>
+          <p:cNvSpPr/>
+          <p:nvPr/>
+        </p:nvSpPr>
+        <p:spPr>
+          <a:xfrm>
+            <a:off x="9418320" y="5029200"/>
             <a:ext cx="1005840" cy="548640"/>
           </a:xfrm>
           <a:prstGeom prst="roundRect">
@@ -3316,13 +3416,13 @@
       </p:sp>
       <p:sp>
         <p:nvSpPr>
-          <p:cNvPr id="28" name="Text 26"/>
-          <p:cNvSpPr/>
-          <p:nvPr/>
-        </p:nvSpPr>
-        <p:spPr>
-          <a:xfrm>
-            <a:off x="9418320" y="4160520"/>
+          <p:cNvPr id="31" name="Text 29"/>
+          <p:cNvSpPr/>
+          <p:nvPr/>
+        </p:nvSpPr>
+        <p:spPr>
+          <a:xfrm>
+            <a:off x="9418320" y="5029200"/>
             <a:ext cx="1005840" cy="548640"/>
           </a:xfrm>
           <a:prstGeom prst="rect">
@@ -3355,13 +3455,13 @@
       </p:sp>
       <p:sp>
         <p:nvSpPr>
-          <p:cNvPr id="29" name="Text 27"/>
-          <p:cNvSpPr/>
-          <p:nvPr/>
-        </p:nvSpPr>
-        <p:spPr>
-          <a:xfrm>
-            <a:off x="274320" y="5029200"/>
+          <p:cNvPr id="32" name="Text 30"/>
+          <p:cNvSpPr/>
+          <p:nvPr/>
+        </p:nvSpPr>
+        <p:spPr>
+          <a:xfrm>
+            <a:off x="274320" y="5897880"/>
             <a:ext cx="1371600" cy="548640"/>
           </a:xfrm>
           <a:prstGeom prst="rect">
@@ -3394,13 +3494,13 @@
       </p:sp>
       <p:sp>
         <p:nvSpPr>
-          <p:cNvPr id="30" name="Shape 28"/>
-          <p:cNvSpPr/>
-          <p:nvPr/>
-        </p:nvSpPr>
-        <p:spPr>
-          <a:xfrm>
-            <a:off x="10424160" y="5029200"/>
+          <p:cNvPr id="33" name="Shape 31"/>
+          <p:cNvSpPr/>
+          <p:nvPr/>
+        </p:nvSpPr>
+        <p:spPr>
+          <a:xfrm>
+            <a:off x="10424160" y="5897880"/>
             <a:ext cx="1463040" cy="548640"/>
           </a:xfrm>
           <a:prstGeom prst="roundRect">
@@ -3416,13 +3516,13 @@
       </p:sp>
       <p:sp>
         <p:nvSpPr>
-          <p:cNvPr id="31" name="Text 29"/>
-          <p:cNvSpPr/>
-          <p:nvPr/>
-        </p:nvSpPr>
-        <p:spPr>
-          <a:xfrm>
-            <a:off x="10424160" y="5029200"/>
+          <p:cNvPr id="34" name="Text 32"/>
+          <p:cNvSpPr/>
+          <p:nvPr/>
+        </p:nvSpPr>
+        <p:spPr>
+          <a:xfrm>
+            <a:off x="10424160" y="5897880"/>
             <a:ext cx="1463040" cy="548640"/>
           </a:xfrm>
           <a:prstGeom prst="rect">
@@ -3455,14 +3555,14 @@
       </p:sp>
       <p:sp>
         <p:nvSpPr>
-          <p:cNvPr id="32" name="Shape 30"/>
+          <p:cNvPr id="35" name="Shape 33"/>
           <p:cNvSpPr/>
           <p:nvPr/>
         </p:nvSpPr>
         <p:spPr>
           <a:xfrm>
             <a:off x="5029200" y="1417320"/>
-            <a:ext cx="0" cy="4206240"/>
+            <a:ext cx="0" cy="5074920"/>
           </a:xfrm>
           <a:prstGeom prst="line">
             <a:avLst/>
@@ -3478,14 +3578,14 @@
       </p:sp>
       <p:sp>
         <p:nvSpPr>
-          <p:cNvPr id="33" name="Shape 31"/>
+          <p:cNvPr id="36" name="Shape 34"/>
           <p:cNvSpPr/>
           <p:nvPr/>
         </p:nvSpPr>
         <p:spPr>
           <a:xfrm>
             <a:off x="8321040" y="1417320"/>
-            <a:ext cx="0" cy="4206240"/>
+            <a:ext cx="0" cy="5074920"/>
           </a:xfrm>
           <a:prstGeom prst="line">
             <a:avLst/>
